--- a/Fase 2/Evidencias Proyecto/Presentación Proyecto.pptx
+++ b/Fase 2/Evidencias Proyecto/Presentación Proyecto.pptx
@@ -1342,7 +1342,7 @@
           <a:p>
             <a:r>
               <a:rPr lang="en-US" dirty="0"/>
-              <a:t>Sugerido: presenta Edgar. Recorrer los seis objetivos por color: dos completados, dos en curso adelantados, uno ajustado y uno con retraso, con la causa.</a:t>
+              <a:t>Sugerido: presenta Edgar. Recorrer los seis objetivos por color: dos completados, uno en curso adelantado (OE5) y uno en curso (OE6), uno ajustado y uno con retraso, con la causa.</a:t>
             </a:r>
           </a:p>
         </p:txBody>
@@ -1777,7 +1777,7 @@
           <a:p>
             <a:r>
               <a:rPr lang="en-US" dirty="0"/>
-              <a:t>Sugerido: presenta Miguel. Demo en vivo siguiendo docs/operacion/recorrido-h2.md. Si algo falla, se muestra la grabación de respaldo. Las capturas son de la web real.</a:t>
+              <a:t>Sugerido: presenta Miguel. Demo en vivo siguiendo docs/operacion/recorrido-h2.md. Si algo falla, se muestra la grabación de respaldo. La vista en vivo es el modelo real; el visor es de la demo con el detector simulado.</a:t>
             </a:r>
           </a:p>
         </p:txBody>
@@ -2686,7 +2686,7 @@
       </p:sp>
       <p:pic>
         <p:nvPicPr>
-          <p:cNvPr id="5" name="logo Duoc UC" descr="/home/edgar/personal/duoc/_generadores/presentacion_fase2_teddy/logo_duoc.jpg"/>
+          <p:cNvPr id="5" name="logo Duoc UC" descr="Logo de Duoc UC, Escuela de Informática y Telecomunicaciones"/>
           <p:cNvPicPr>
             <a:picLocks noChangeAspect="1"/>
           </p:cNvPicPr>
@@ -2881,7 +2881,7 @@
       </p:sp>
       <p:pic>
         <p:nvPicPr>
-          <p:cNvPr id="11" name="ícono casco" descr="preencoded.png"/>
+          <p:cNvPr id="11" name="ícono casco" descr="Ícono de casco de seguridad en un círculo naranja"/>
           <p:cNvPicPr>
             <a:picLocks noChangeAspect="1"/>
           </p:cNvPicPr>
@@ -2905,7 +2905,7 @@
       </p:pic>
       <p:pic>
         <p:nvPicPr>
-          <p:cNvPr id="12" name="captura bandeja" descr="/home/edgar/personal/duoc/_generadores/presentacion_fase2_teddy/caps/crops/bandeja.png"/>
+          <p:cNvPr id="12" name="captura bandeja" descr="Captura de la bandeja de hallazgos de la web, con un hallazgo de prioridad alta por revisar"/>
           <p:cNvPicPr>
             <a:picLocks noChangeAspect="1"/>
           </p:cNvPicPr>
@@ -3168,7 +3168,7 @@
       </p:sp>
       <p:pic>
         <p:nvPicPr>
-          <p:cNvPr id="9" name="ícono Grabación en obra" descr="preencoded.png"/>
+          <p:cNvPr id="9" name="ícono Grabación en obra" descr="Ícono de cámara de video"/>
           <p:cNvPicPr>
             <a:picLocks noChangeAspect="1"/>
           </p:cNvPicPr>
@@ -3228,7 +3228,7 @@
       </p:sp>
       <p:pic>
         <p:nvPicPr>
-          <p:cNvPr id="11" name="flecha ajuste 0" descr="preencoded.png"/>
+          <p:cNvPr id="11" name="flecha ajuste 0" descr="Flecha que lleva del plan anterior al ajuste"/>
           <p:cNvPicPr>
             <a:picLocks noChangeAspect="1"/>
           </p:cNvPicPr>
@@ -3380,7 +3380,7 @@
       </p:sp>
       <p:pic>
         <p:nvPicPr>
-          <p:cNvPr id="16" name="ícono Tres rondas de etiquetado" descr="preencoded.png"/>
+          <p:cNvPr id="16" name="ícono Tres rondas de etiquetado" descr="Ícono de etiquetas"/>
           <p:cNvPicPr>
             <a:picLocks noChangeAspect="1"/>
           </p:cNvPicPr>
@@ -3440,7 +3440,7 @@
       </p:sp>
       <p:pic>
         <p:nvPicPr>
-          <p:cNvPr id="18" name="flecha ajuste 1" descr="preencoded.png"/>
+          <p:cNvPr id="18" name="flecha ajuste 1" descr="Flecha que lleva del plan anterior al ajuste"/>
           <p:cNvPicPr>
             <a:picLocks noChangeAspect="1"/>
           </p:cNvPicPr>
@@ -3592,7 +3592,7 @@
       </p:sp>
       <p:pic>
         <p:nvPicPr>
-          <p:cNvPr id="23" name="ícono Video solo por carpeta vigilada" descr="preencoded.png"/>
+          <p:cNvPr id="23" name="ícono Video solo por carpeta vigilada" descr="Ícono de monitor"/>
           <p:cNvPicPr>
             <a:picLocks noChangeAspect="1"/>
           </p:cNvPicPr>
@@ -3652,7 +3652,7 @@
       </p:sp>
       <p:pic>
         <p:nvPicPr>
-          <p:cNvPr id="25" name="flecha ajuste 2" descr="preencoded.png"/>
+          <p:cNvPr id="25" name="flecha ajuste 2" descr="Flecha que lleva del plan anterior al ajuste"/>
           <p:cNvPicPr>
             <a:picLocks noChangeAspect="1"/>
           </p:cNvPicPr>
@@ -3804,7 +3804,7 @@
       </p:sp>
       <p:pic>
         <p:nvPicPr>
-          <p:cNvPr id="30" name="ícono Calendario corrido una semana" descr="preencoded.png"/>
+          <p:cNvPr id="30" name="ícono Calendario corrido una semana" descr="Ícono de calendario con marca de verificación"/>
           <p:cNvPicPr>
             <a:picLocks noChangeAspect="1"/>
           </p:cNvPicPr>
@@ -3864,7 +3864,7 @@
       </p:sp>
       <p:pic>
         <p:nvPicPr>
-          <p:cNvPr id="32" name="flecha ajuste 3" descr="preencoded.png"/>
+          <p:cNvPr id="32" name="flecha ajuste 3" descr="Flecha que lleva del plan anterior al ajuste"/>
           <p:cNvPicPr>
             <a:picLocks noChangeAspect="1"/>
           </p:cNvPicPr>
@@ -4070,7 +4070,7 @@
             <a:pPr algn="r"/>
             <a:fld id="{F7021451-1387-4CA6-816F-3879F97B5CBC}" type="slidenum">
               <a:rPr lang="en-US" b="0"/>
-              <a:t>10</a:t>
+              <a:t>12</a:t>
             </a:fld>
             <a:endParaRPr lang="en-US"/>
           </a:p>
@@ -4202,7 +4202,7 @@
       </p:sp>
       <p:pic>
         <p:nvPicPr>
-          <p:cNvPr id="6" name="ícono iterativa" descr="preencoded.png"/>
+          <p:cNvPr id="6" name="ícono iterativa" descr="Ícono de flechas circulares, para el ciclo iterativo"/>
           <p:cNvPicPr>
             <a:picLocks noChangeAspect="1"/>
           </p:cNvPicPr>
@@ -4328,7 +4328,7 @@
       </p:sp>
       <p:pic>
         <p:nvPicPr>
-          <p:cNvPr id="10" name="ícono Gestión" descr="preencoded.png"/>
+          <p:cNvPr id="10" name="ícono Gestión" descr="Ícono de lista de tareas"/>
           <p:cNvPicPr>
             <a:picLocks noChangeAspect="1"/>
           </p:cNvPicPr>
@@ -4451,7 +4451,7 @@
       </p:sp>
       <p:pic>
         <p:nvPicPr>
-          <p:cNvPr id="14" name="ícono Contrato de API congelado" descr="preencoded.png"/>
+          <p:cNvPr id="14" name="ícono Contrato de API congelado" descr="Ícono de documento con contrato"/>
           <p:cNvPicPr>
             <a:picLocks noChangeAspect="1"/>
           </p:cNvPicPr>
@@ -4539,7 +4539,7 @@
                   <a:schemeClr val="accent4"/>
                 </a:solidFill>
               </a:rPr>
-              <a:t>La web avanzó desde la S5 sin esperar al backend</a:t>
+              <a:t>La web avanzó desde la S5 sin esperar al servidor</a:t>
             </a:r>
             <a:endParaRPr lang="en-US" sz="1500" dirty="0"/>
           </a:p>
@@ -4574,7 +4574,7 @@
       </p:sp>
       <p:pic>
         <p:nvPicPr>
-          <p:cNvPr id="18" name="ícono Integración continua" descr="preencoded.png"/>
+          <p:cNvPr id="18" name="ícono Integración continua" descr="Ícono de ramas de código"/>
           <p:cNvPicPr>
             <a:picLocks noChangeAspect="1"/>
           </p:cNvPicPr>
@@ -4697,7 +4697,7 @@
       </p:sp>
       <p:pic>
         <p:nvPicPr>
-          <p:cNvPr id="22" name="ícono Evaluación honesta" descr="preencoded.png"/>
+          <p:cNvPr id="22" name="ícono Evaluación honesta" descr="Ícono de matraz de laboratorio"/>
           <p:cNvPicPr>
             <a:picLocks noChangeAspect="1"/>
           </p:cNvPicPr>
@@ -4820,7 +4820,7 @@
       </p:sp>
       <p:pic>
         <p:nvPicPr>
-          <p:cNvPr id="26" name="ícono Verificaciones con fecha" descr="preencoded.png"/>
+          <p:cNvPr id="26" name="ícono Verificaciones con fecha" descr="Ícono de calendario con marca de verificación"/>
           <p:cNvPicPr>
             <a:picLocks noChangeAspect="1"/>
           </p:cNvPicPr>
@@ -4943,7 +4943,7 @@
       </p:sp>
       <p:pic>
         <p:nvPicPr>
-          <p:cNvPr id="30" name="ícono Privacidad por diseño" descr="preencoded.png"/>
+          <p:cNvPr id="30" name="ícono Privacidad por diseño" descr="Ícono de escudo"/>
           <p:cNvPicPr>
             <a:picLocks noChangeAspect="1"/>
           </p:cNvPicPr>
@@ -5031,7 +5031,7 @@
                   <a:schemeClr val="accent4"/>
                 </a:solidFill>
               </a:rPr>
-              <a:t>Sin identificar personas; supresión de grupos de menos de 5</a:t>
+              <a:t>Sin identificar personas; supresión de celdas con menos de 5 casos</a:t>
             </a:r>
             <a:endParaRPr lang="en-US" sz="1500" dirty="0"/>
           </a:p>
@@ -5149,7 +5149,7 @@
             <a:pPr algn="r"/>
             <a:fld id="{F7021451-1387-4CA6-816F-3879F97B5CBC}" type="slidenum">
               <a:rPr lang="en-US" b="0"/>
-              <a:t>11</a:t>
+              <a:t>13</a:t>
             </a:fld>
             <a:endParaRPr lang="en-US"/>
           </a:p>
@@ -5281,7 +5281,7 @@
       </p:sp>
       <p:pic>
         <p:nvPicPr>
-          <p:cNvPr id="6" name="ícono Alcance de la versión 1.0 (S15)" descr="preencoded.png"/>
+          <p:cNvPr id="6" name="ícono Alcance de la versión 1.0 (S15)" descr="Ícono de círculo con marca de verificación"/>
           <p:cNvPicPr>
             <a:picLocks noChangeAspect="1"/>
           </p:cNvPicPr>
@@ -5509,7 +5509,7 @@
       </p:sp>
       <p:pic>
         <p:nvPicPr>
-          <p:cNvPr id="11" name="ícono Limitaciones" descr="preencoded.png"/>
+          <p:cNvPr id="11" name="ícono Limitaciones" descr="Ícono de triángulo de advertencia"/>
           <p:cNvPicPr>
             <a:picLocks noChangeAspect="1"/>
           </p:cNvPicPr>
@@ -5700,7 +5700,7 @@
             <a:pPr algn="r"/>
             <a:fld id="{F7021451-1387-4CA6-816F-3879F97B5CBC}" type="slidenum">
               <a:rPr lang="en-US" b="0"/>
-              <a:t>12</a:t>
+              <a:t>14</a:t>
             </a:fld>
             <a:endParaRPr lang="en-US"/>
           </a:p>
@@ -6324,7 +6324,7 @@
       </p:sp>
       <p:pic>
         <p:nvPicPr>
-          <p:cNvPr id="19" name="ícono casco cierre" descr="preencoded.png"/>
+          <p:cNvPr id="19" name="ícono casco cierre" descr="Ícono de casco de seguridad en un círculo naranja"/>
           <p:cNvPicPr>
             <a:picLocks noChangeAspect="1"/>
           </p:cNvPicPr>
@@ -6385,7 +6385,7 @@
             <a:pPr algn="r"/>
             <a:fld id="{F7021451-1387-4CA6-816F-3879F97B5CBC}" type="slidenum">
               <a:rPr lang="en-US" b="0"/>
-              <a:t>13</a:t>
+              <a:t>15</a:t>
             </a:fld>
             <a:endParaRPr lang="en-US"/>
           </a:p>
@@ -6491,7 +6491,7 @@
             <a:pPr algn="r"/>
             <a:fld id="{F7021451-1387-4CA6-816F-3879F97B5CBC}" type="slidenum">
               <a:rPr lang="en-US" b="0"/>
-              <a:t>12</a:t>
+              <a:t>10</a:t>
             </a:fld>
             <a:endParaRPr lang="en-US"/>
           </a:p>
@@ -6551,7 +6551,7 @@
       </p:sp>
       <p:pic>
         <p:nvPicPr>
-          <p:cNvPr id="27" name="captura panel general" descr="panel.png"/>
+          <p:cNvPr id="27" name="captura panel general" descr="Captura del panel general: filtros, indicador de hallazgos abiertos, tendencia semanal y ranking de EPP incumplido"/>
           <p:cNvPicPr>
             <a:picLocks noChangeAspect="1"/>
           </p:cNvPicPr>
@@ -6634,7 +6634,7 @@
       </p:sp>
       <p:pic>
         <p:nvPicPr>
-          <p:cNvPr id="29" name="captura reglas" descr="reglas.png"/>
+          <p:cNvPr id="29" name="captura reglas" descr="Captura de la pantalla de reglas de seguridad, con una regla activa por área"/>
           <p:cNvPicPr>
             <a:picLocks noChangeAspect="1"/>
           </p:cNvPicPr>
@@ -6717,7 +6717,7 @@
       </p:sp>
       <p:pic>
         <p:nvPicPr>
-          <p:cNvPr id="31" name="captura pedido en proceso" descr="pedido.png"/>
+          <p:cNvPr id="31" name="captura pedido en proceso" descr="Captura de la cola de videos con un video pedido desde la web en proceso y la vista del modelo con cajas"/>
           <p:cNvPicPr>
             <a:picLocks noChangeAspect="1"/>
           </p:cNvPicPr>
@@ -6800,7 +6800,7 @@
       </p:sp>
       <p:pic>
         <p:nvPicPr>
-          <p:cNvPr id="33" name="captura cola de videos" descr="cola.png"/>
+          <p:cNvPr id="33" name="captura cola de videos" descr="Captura de la cola de videos, con un video en cola y otro con error y botón para reprocesar"/>
           <p:cNvPicPr>
             <a:picLocks noChangeAspect="1"/>
           </p:cNvPicPr>
@@ -6962,7 +6962,7 @@
             <a:pPr algn="r"/>
             <a:fld id="{F7021451-1387-4CA6-816F-3879F97B5CBC}" type="slidenum">
               <a:rPr lang="en-US" b="0"/>
-              <a:t>12</a:t>
+              <a:t>11</a:t>
             </a:fld>
             <a:endParaRPr lang="en-US"/>
           </a:p>
@@ -6970,7 +6970,7 @@
       </p:sp>
       <p:pic>
         <p:nvPicPr>
-          <p:cNvPr id="26" name="diagrama entidad-relación" descr="er.png"/>
+          <p:cNvPr id="26" name="diagrama entidad-relación" descr="Diagrama entidad-relación de las 15 tablas de la base de datos y sus relaciones"/>
           <p:cNvPicPr>
             <a:picLocks noChangeAspect="1"/>
           </p:cNvPicPr>
@@ -7332,7 +7332,7 @@
       </p:sp>
       <p:pic>
         <p:nvPicPr>
-          <p:cNvPr id="6" name="ícono Edgar Tolentino" descr="preencoded.png"/>
+          <p:cNvPr id="6" name="ícono Edgar Tolentino" descr="Ícono de microprocesador, para el líder técnico"/>
           <p:cNvPicPr>
             <a:picLocks noChangeAspect="1"/>
           </p:cNvPicPr>
@@ -7599,7 +7599,7 @@
       </p:sp>
       <p:pic>
         <p:nvPicPr>
-          <p:cNvPr id="13" name="ícono Miguel Ortega" descr="preencoded.png"/>
+          <p:cNvPr id="13" name="ícono Miguel Ortega" descr="Ícono de monitor, para el desarrollo frontend"/>
           <p:cNvPicPr>
             <a:picLocks noChangeAspect="1"/>
           </p:cNvPicPr>
@@ -7866,7 +7866,7 @@
       </p:sp>
       <p:pic>
         <p:nvPicPr>
-          <p:cNvPr id="20" name="ícono Lian Grandón" descr="preencoded.png"/>
+          <p:cNvPr id="20" name="ícono Lian Grandón" descr="Ícono de portapapeles con marca de verificación, para frontend y calidad"/>
           <p:cNvPicPr>
             <a:picLocks noChangeAspect="1"/>
           </p:cNvPicPr>
@@ -8246,7 +8246,7 @@
       </p:sp>
       <p:pic>
         <p:nvPicPr>
-          <p:cNvPr id="6" name="ícono Problema" descr="preencoded.png"/>
+          <p:cNvPr id="6" name="ícono Problema" descr="Ícono de triángulo de advertencia"/>
           <p:cNvPicPr>
             <a:picLocks noChangeAspect="1"/>
           </p:cNvPicPr>
@@ -8401,7 +8401,7 @@
       </p:sp>
       <p:pic>
         <p:nvPicPr>
-          <p:cNvPr id="11" name="ícono Solución" descr="preencoded.png"/>
+          <p:cNvPr id="11" name="ícono Solución" descr="Ícono de casco de seguridad"/>
           <p:cNvPicPr>
             <a:picLocks noChangeAspect="1"/>
           </p:cNvPicPr>
@@ -8500,7 +8500,7 @@
       </p:sp>
       <p:pic>
         <p:nvPicPr>
-          <p:cNvPr id="14" name="captura bandeja" descr="/home/edgar/personal/duoc/_generadores/presentacion_fase2_teddy/caps/crops/bandeja.png"/>
+          <p:cNvPr id="14" name="captura bandeja" descr="Captura de la bandeja de hallazgos de la web, con un hallazgo de prioridad alta por revisar"/>
           <p:cNvPicPr>
             <a:picLocks noChangeAspect="1"/>
           </p:cNvPicPr>
@@ -8558,7 +8558,7 @@
       </p:sp>
       <p:pic>
         <p:nvPicPr>
-          <p:cNvPr id="16" name="ícono Sin identificar personas" descr="preencoded.png"/>
+          <p:cNvPr id="16" name="ícono Sin identificar personas" descr="Ícono de ojo tachado"/>
           <p:cNvPicPr>
             <a:picLocks noChangeAspect="1"/>
           </p:cNvPicPr>
@@ -8681,7 +8681,7 @@
       </p:sp>
       <p:pic>
         <p:nvPicPr>
-          <p:cNvPr id="20" name="ícono El humano valida" descr="preencoded.png"/>
+          <p:cNvPr id="20" name="ícono El humano valida" descr="Ícono de persona con marca de verificación"/>
           <p:cNvPicPr>
             <a:picLocks noChangeAspect="1"/>
           </p:cNvPicPr>
@@ -8804,7 +8804,7 @@
       </p:sp>
       <p:pic>
         <p:nvPicPr>
-          <p:cNvPr id="24" name="ícono Configurable" descr="preencoded.png"/>
+          <p:cNvPr id="24" name="ícono Configurable" descr="Ícono de engranajes"/>
           <p:cNvPicPr>
             <a:picLocks noChangeAspect="1"/>
           </p:cNvPicPr>
@@ -9761,7 +9761,7 @@
                   <a:schemeClr val="accent4"/>
                 </a:solidFill>
               </a:rPr>
-              <a:t>15 tablas y motor de reglas, tres semanas antes.</a:t>
+              <a:t>15 tablas y motor de reglas, cuatro semanas antes.</a:t>
             </a:r>
             <a:endParaRPr lang="en-US" sz="1500" dirty="0"/>
           </a:p>
@@ -10121,7 +10121,7 @@
                   <a:schemeClr val="accent4"/>
                 </a:solidFill>
               </a:rPr>
-              <a:t>1.319 pruebas automatizadas; plan formal en la S14.</a:t>
+              <a:t>1.312 pruebas automatizadas; plan formal en la S14.</a:t>
             </a:r>
             <a:endParaRPr lang="en-US" sz="1500" dirty="0"/>
           </a:p>
@@ -10442,7 +10442,7 @@
                 <a:ea typeface="Arial" pitchFamily="34" charset="-122"/>
                 <a:cs typeface="Arial" pitchFamily="34" charset="-120"/>
               </a:rPr>
-              <a:t>1.319</a:t>
+              <a:t>1.312</a:t>
             </a:r>
             <a:endParaRPr lang="en-US" sz="5400" dirty="0"/>
           </a:p>
@@ -10758,7 +10758,7 @@
                   <a:schemeClr val="tx1"/>
                 </a:solidFill>
               </a:rPr>
-              <a:t>Para 5 minutos de video</a:t>
+              <a:t>Para 5 minutos de video (9-oct)</a:t>
             </a:r>
             <a:endParaRPr lang="en-US" sz="2000" dirty="0"/>
           </a:p>
@@ -10829,7 +10829,7 @@
       </p:sp>
       <p:pic>
         <p:nvPicPr>
-          <p:cNvPr id="21" name="ícono 12 decisiones de arquitectura (ADR)" descr="preencoded.png"/>
+          <p:cNvPr id="21" name="ícono 12 decisiones de arquitectura (ADR)" descr="Ícono de documento con contrato"/>
           <p:cNvPicPr>
             <a:picLocks noChangeAspect="1"/>
           </p:cNvPicPr>
@@ -10916,7 +10916,7 @@
       </p:sp>
       <p:pic>
         <p:nvPicPr>
-          <p:cNvPr id="24" name="ícono 15 tablas en PostgreSQL" descr="preencoded.png"/>
+          <p:cNvPr id="24" name="ícono 15 tablas en PostgreSQL" descr="Ícono de base de datos"/>
           <p:cNvPicPr>
             <a:picLocks noChangeAspect="1"/>
           </p:cNvPicPr>
@@ -11003,7 +11003,7 @@
       </p:sp>
       <p:pic>
         <p:nvPicPr>
-          <p:cNvPr id="27" name="ícono 79 PR fusionados por el equipo" descr="preencoded.png"/>
+          <p:cNvPr id="27" name="ícono 79 PR fusionados por el equipo" descr="Ícono de ramas de código"/>
           <p:cNvPicPr>
             <a:picLocks noChangeAspect="1"/>
           </p:cNvPicPr>
@@ -11232,7 +11232,7 @@
       </p:sp>
       <p:pic>
         <p:nvPicPr>
-          <p:cNvPr id="6" name="ícono Video" descr="preencoded.png"/>
+          <p:cNvPr id="6" name="ícono Video" descr="Ícono de cinta de película"/>
           <p:cNvPicPr>
             <a:picLocks noChangeAspect="1"/>
           </p:cNvPicPr>
@@ -11328,7 +11328,7 @@
       </p:sp>
       <p:pic>
         <p:nvPicPr>
-          <p:cNvPr id="9" name="flecha 0" descr="preencoded.png"/>
+          <p:cNvPr id="9" name="flecha 0" descr="Flecha que indica el paso siguiente del flujo"/>
           <p:cNvPicPr>
             <a:picLocks noChangeAspect="1"/>
           </p:cNvPicPr>
@@ -11408,7 +11408,7 @@
       </p:sp>
       <p:pic>
         <p:nvPicPr>
-          <p:cNvPr id="12" name="ícono Detector" descr="preencoded.png"/>
+          <p:cNvPr id="12" name="ícono Detector" descr="Ícono de lupa"/>
           <p:cNvPicPr>
             <a:picLocks noChangeAspect="1"/>
           </p:cNvPicPr>
@@ -11504,7 +11504,7 @@
       </p:sp>
       <p:pic>
         <p:nvPicPr>
-          <p:cNvPr id="15" name="flecha 1" descr="preencoded.png"/>
+          <p:cNvPr id="15" name="flecha 1" descr="Flecha que indica el paso siguiente del flujo"/>
           <p:cNvPicPr>
             <a:picLocks noChangeAspect="1"/>
           </p:cNvPicPr>
@@ -11584,7 +11584,7 @@
       </p:sp>
       <p:pic>
         <p:nvPicPr>
-          <p:cNvPr id="18" name="ícono Seguimiento" descr="preencoded.png"/>
+          <p:cNvPr id="18" name="ícono Seguimiento" descr="Ícono de ruta con puntos"/>
           <p:cNvPicPr>
             <a:picLocks noChangeAspect="1"/>
           </p:cNvPicPr>
@@ -11680,7 +11680,7 @@
       </p:sp>
       <p:pic>
         <p:nvPicPr>
-          <p:cNvPr id="21" name="flecha 2" descr="preencoded.png"/>
+          <p:cNvPr id="21" name="flecha 2" descr="Flecha que indica el paso siguiente del flujo"/>
           <p:cNvPicPr>
             <a:picLocks noChangeAspect="1"/>
           </p:cNvPicPr>
@@ -11760,7 +11760,7 @@
       </p:sp>
       <p:pic>
         <p:nvPicPr>
-          <p:cNvPr id="24" name="ícono Hallazgo" descr="preencoded.png"/>
+          <p:cNvPr id="24" name="ícono Hallazgo" descr="Ícono de capas apiladas"/>
           <p:cNvPicPr>
             <a:picLocks noChangeAspect="1"/>
           </p:cNvPicPr>
@@ -11856,7 +11856,7 @@
       </p:sp>
       <p:pic>
         <p:nvPicPr>
-          <p:cNvPr id="27" name="flecha 3" descr="preencoded.png"/>
+          <p:cNvPr id="27" name="flecha 3" descr="Flecha que indica el paso siguiente del flujo"/>
           <p:cNvPicPr>
             <a:picLocks noChangeAspect="1"/>
           </p:cNvPicPr>
@@ -11936,7 +11936,7 @@
       </p:sp>
       <p:pic>
         <p:nvPicPr>
-          <p:cNvPr id="30" name="ícono Reglas" descr="preencoded.png"/>
+          <p:cNvPr id="30" name="ícono Reglas" descr="Ícono de balanza"/>
           <p:cNvPicPr>
             <a:picLocks noChangeAspect="1"/>
           </p:cNvPicPr>
@@ -12032,7 +12032,7 @@
       </p:sp>
       <p:pic>
         <p:nvPicPr>
-          <p:cNvPr id="33" name="flecha 4" descr="preencoded.png"/>
+          <p:cNvPr id="33" name="flecha 4" descr="Flecha que indica el paso siguiente del flujo"/>
           <p:cNvPicPr>
             <a:picLocks noChangeAspect="1"/>
           </p:cNvPicPr>
@@ -12112,7 +12112,7 @@
       </p:sp>
       <p:pic>
         <p:nvPicPr>
-          <p:cNvPr id="36" name="ícono Web y alertas" descr="preencoded.png"/>
+          <p:cNvPr id="36" name="ícono Web y alertas" descr="Ícono de campana"/>
           <p:cNvPicPr>
             <a:picLocks noChangeAspect="1"/>
           </p:cNvPicPr>
@@ -14329,7 +14329,7 @@
       </p:sp>
       <p:pic>
         <p:nvPicPr>
-          <p:cNvPr id="7" name="ícono Etiquetado en CVAT" descr="preencoded.png"/>
+          <p:cNvPr id="7" name="ícono Etiquetado en CVAT" descr="Ícono de etiquetas"/>
           <p:cNvPicPr>
             <a:picLocks noChangeAspect="1"/>
           </p:cNvPicPr>
@@ -14481,7 +14481,7 @@
       </p:sp>
       <p:pic>
         <p:nvPicPr>
-          <p:cNvPr id="12" name="ícono Modelo v1: RF-DETR Nano" descr="preencoded.png"/>
+          <p:cNvPr id="12" name="ícono Modelo v1: RF-DETR Nano" descr="Ícono de microprocesador"/>
           <p:cNvPicPr>
             <a:picLocks noChangeAspect="1"/>
           </p:cNvPicPr>
@@ -14633,7 +14633,7 @@
       </p:sp>
       <p:pic>
         <p:nvPicPr>
-          <p:cNvPr id="17" name="ícono Lo que falta" descr="preencoded.png"/>
+          <p:cNvPr id="17" name="ícono Lo que falta" descr="Ícono de matraz de laboratorio"/>
           <p:cNvPicPr>
             <a:picLocks noChangeAspect="1"/>
           </p:cNvPicPr>
@@ -14842,7 +14842,7 @@
       </p:sp>
       <p:pic>
         <p:nvPicPr>
-          <p:cNvPr id="4" name="captura visor" descr="/home/edgar/personal/duoc/_generadores/presentacion_fase2_teddy/caps/crops/visor.png"/>
+          <p:cNvPr id="4" name="captura visor" descr="Captura del visor de evidencia de un hallazgo: persona con el rostro pixelado, línea de tiempo del evento y botones para confirmar o descartar"/>
           <p:cNvPicPr>
             <a:picLocks noChangeAspect="1"/>
           </p:cNvPicPr>
@@ -15290,7 +15290,7 @@
         <p:spPr>
           <a:xfrm>
             <a:off x="7528255" y="5728447"/>
-            <a:ext cx="4114800" cy="274320"/>
+            <a:ext cx="4114800" cy="420000"/>
           </a:xfrm>
           <a:prstGeom prst="rect">
             <a:avLst/>
@@ -15311,7 +15311,7 @@
                   <a:schemeClr val="accent6"/>
                 </a:solidFill>
               </a:rPr>
-              <a:t>Visor: el rostro se difumina antes de guardarse</a:t>
+              <a:t>Visor (demo, detector simulado): el rostro se difumina antes de guardarse</a:t>
             </a:r>
             <a:endParaRPr lang="en-US" sz="1200" dirty="0"/>
           </a:p>
@@ -15364,7 +15364,7 @@
       </p:sp>
       <p:pic>
         <p:nvPicPr>
-          <p:cNvPr id="26" name="captura vista en vivo" descr="2026-10-12-vista-en-vivo-modelo.png"/>
+          <p:cNvPr id="26" name="captura vista en vivo" descr="Captura de la vista en vivo del procesamiento: cuadro de la obra con cajas de persona y casco sobre dos trabajadores, con los rostros tapados"/>
           <p:cNvPicPr>
             <a:picLocks noChangeAspect="1"/>
           </p:cNvPicPr>

--- a/Fase 2/Evidencias Proyecto/Presentación Proyecto.pptx
+++ b/Fase 2/Evidencias Proyecto/Presentación Proyecto.pptx
@@ -1005,7 +1005,7 @@
           <a:lstStyle/>
           <a:p>
             <a:r>
-              <a:t>Sugerido: presenta Lian. Las pantallas principales de la web. Panel, reglas y cola se capturaron contra el contrato simulado (Prism); el pedido en proceso es el sistema real con el modelo. Todo está en Fase 2/Evidencias Proyecto/Evidencias de sistema/Aplicacion.</a:t>
+              <a:t>Sugerido: presenta Lian. Las pantallas principales de la web. Panel, reglas y cola se capturaron contra el contrato simulado (Prism); el pedido en proceso es el sistema real con el modelo. Todo está en Fase 2/Evidencias Proyecto/Evidencias de sistema/Aplicación.</a:t>
             </a:r>
           </a:p>
         </p:txBody>
@@ -1952,7 +1952,7 @@
       </p:grpSpPr>
       <p:pic>
         <p:nvPicPr>
-          <p:cNvPr id="2" name="Image 0" descr="/home/edgar/personal/duoc/_generadores/presentacion_fase2_teddy/logo_duoc.jpg"/>
+          <p:cNvPr id="2" name="Image 0" descr="Logo de Duoc UC"/>
           <p:cNvPicPr>
             <a:picLocks noChangeAspect="1"/>
           </p:cNvPicPr>

--- a/Fase 2/Evidencias Proyecto/Presentación Proyecto.pptx
+++ b/Fase 2/Evidencias Proyecto/Presentación Proyecto.pptx
@@ -1005,7 +1005,7 @@
           <a:lstStyle/>
           <a:p>
             <a:r>
-              <a:t>Sugerido: presenta Lian. Las pantallas principales de la web. Panel, reglas y cola se capturaron contra el contrato simulado (Prism); el pedido en proceso es el sistema real con el modelo. Todo está en Fase 2/Evidencias Proyecto/Evidencias de sistema/Aplicacion.</a:t>
+              <a:t>Sugerido: presenta Lian. Las pantallas principales de la web. Panel, reglas y cola se capturaron contra el contrato simulado (Prism); el pedido en proceso es el sistema real con el modelo. Todo está en Fase 2/Evidencias Proyecto/Evidencias de sistema/Aplicación.</a:t>
             </a:r>
           </a:p>
         </p:txBody>
@@ -1342,7 +1342,7 @@
           <a:p>
             <a:r>
               <a:rPr lang="en-US" dirty="0"/>
-              <a:t>Sugerido: presenta Edgar. Recorrer los seis objetivos por color: dos completados, dos en curso adelantados, uno ajustado y uno con retraso, con la causa.</a:t>
+              <a:t>Sugerido: presenta Edgar. Recorrer los seis objetivos por color: dos completados, uno en curso adelantado (OE5) y uno en curso (OE6), uno ajustado y uno con retraso, con la causa.</a:t>
             </a:r>
           </a:p>
         </p:txBody>
@@ -1777,7 +1777,7 @@
           <a:p>
             <a:r>
               <a:rPr lang="en-US" dirty="0"/>
-              <a:t>Sugerido: presenta Miguel. Demo en vivo siguiendo docs/operacion/recorrido-h2.md. Si algo falla, se muestra la grabación de respaldo. Las capturas son de la web real.</a:t>
+              <a:t>Sugerido: presenta Miguel. Demo en vivo siguiendo docs/operacion/recorrido-h2.md. Si algo falla, se muestra la grabación de respaldo. La vista en vivo es el modelo real; el visor es de la demo con el detector simulado.</a:t>
             </a:r>
           </a:p>
         </p:txBody>
@@ -1952,7 +1952,7 @@
       </p:grpSpPr>
       <p:pic>
         <p:nvPicPr>
-          <p:cNvPr id="2" name="Image 0" descr="/home/edgar/personal/duoc/_generadores/presentacion_fase2_teddy/logo_duoc.jpg"/>
+          <p:cNvPr id="2" name="Image 0" descr="Logo de Duoc UC"/>
           <p:cNvPicPr>
             <a:picLocks noChangeAspect="1"/>
           </p:cNvPicPr>
@@ -2686,7 +2686,7 @@
       </p:sp>
       <p:pic>
         <p:nvPicPr>
-          <p:cNvPr id="5" name="logo Duoc UC" descr="/home/edgar/personal/duoc/_generadores/presentacion_fase2_teddy/logo_duoc.jpg"/>
+          <p:cNvPr id="5" name="logo Duoc UC" descr="Logo de Duoc UC, Escuela de Informática y Telecomunicaciones"/>
           <p:cNvPicPr>
             <a:picLocks noChangeAspect="1"/>
           </p:cNvPicPr>
@@ -2881,7 +2881,7 @@
       </p:sp>
       <p:pic>
         <p:nvPicPr>
-          <p:cNvPr id="11" name="ícono casco" descr="preencoded.png"/>
+          <p:cNvPr id="11" name="ícono casco" descr="Ícono de casco de seguridad en un círculo naranja"/>
           <p:cNvPicPr>
             <a:picLocks noChangeAspect="1"/>
           </p:cNvPicPr>
@@ -2905,7 +2905,7 @@
       </p:pic>
       <p:pic>
         <p:nvPicPr>
-          <p:cNvPr id="12" name="captura bandeja" descr="/home/edgar/personal/duoc/_generadores/presentacion_fase2_teddy/caps/crops/bandeja.png"/>
+          <p:cNvPr id="12" name="captura bandeja" descr="Captura de la bandeja de hallazgos de la web, con un hallazgo de prioridad alta por revisar"/>
           <p:cNvPicPr>
             <a:picLocks noChangeAspect="1"/>
           </p:cNvPicPr>
@@ -3168,7 +3168,7 @@
       </p:sp>
       <p:pic>
         <p:nvPicPr>
-          <p:cNvPr id="9" name="ícono Grabación en obra" descr="preencoded.png"/>
+          <p:cNvPr id="9" name="ícono Grabación en obra" descr="Ícono de cámara de video"/>
           <p:cNvPicPr>
             <a:picLocks noChangeAspect="1"/>
           </p:cNvPicPr>
@@ -3228,7 +3228,7 @@
       </p:sp>
       <p:pic>
         <p:nvPicPr>
-          <p:cNvPr id="11" name="flecha ajuste 0" descr="preencoded.png"/>
+          <p:cNvPr id="11" name="flecha ajuste 0" descr="Flecha que lleva del plan anterior al ajuste"/>
           <p:cNvPicPr>
             <a:picLocks noChangeAspect="1"/>
           </p:cNvPicPr>
@@ -3380,7 +3380,7 @@
       </p:sp>
       <p:pic>
         <p:nvPicPr>
-          <p:cNvPr id="16" name="ícono Tres rondas de etiquetado" descr="preencoded.png"/>
+          <p:cNvPr id="16" name="ícono Tres rondas de etiquetado" descr="Ícono de etiquetas"/>
           <p:cNvPicPr>
             <a:picLocks noChangeAspect="1"/>
           </p:cNvPicPr>
@@ -3440,7 +3440,7 @@
       </p:sp>
       <p:pic>
         <p:nvPicPr>
-          <p:cNvPr id="18" name="flecha ajuste 1" descr="preencoded.png"/>
+          <p:cNvPr id="18" name="flecha ajuste 1" descr="Flecha que lleva del plan anterior al ajuste"/>
           <p:cNvPicPr>
             <a:picLocks noChangeAspect="1"/>
           </p:cNvPicPr>
@@ -3592,7 +3592,7 @@
       </p:sp>
       <p:pic>
         <p:nvPicPr>
-          <p:cNvPr id="23" name="ícono Video solo por carpeta vigilada" descr="preencoded.png"/>
+          <p:cNvPr id="23" name="ícono Video solo por carpeta vigilada" descr="Ícono de monitor"/>
           <p:cNvPicPr>
             <a:picLocks noChangeAspect="1"/>
           </p:cNvPicPr>
@@ -3652,7 +3652,7 @@
       </p:sp>
       <p:pic>
         <p:nvPicPr>
-          <p:cNvPr id="25" name="flecha ajuste 2" descr="preencoded.png"/>
+          <p:cNvPr id="25" name="flecha ajuste 2" descr="Flecha que lleva del plan anterior al ajuste"/>
           <p:cNvPicPr>
             <a:picLocks noChangeAspect="1"/>
           </p:cNvPicPr>
@@ -3804,7 +3804,7 @@
       </p:sp>
       <p:pic>
         <p:nvPicPr>
-          <p:cNvPr id="30" name="ícono Calendario corrido una semana" descr="preencoded.png"/>
+          <p:cNvPr id="30" name="ícono Calendario corrido una semana" descr="Ícono de calendario con marca de verificación"/>
           <p:cNvPicPr>
             <a:picLocks noChangeAspect="1"/>
           </p:cNvPicPr>
@@ -3864,7 +3864,7 @@
       </p:sp>
       <p:pic>
         <p:nvPicPr>
-          <p:cNvPr id="32" name="flecha ajuste 3" descr="preencoded.png"/>
+          <p:cNvPr id="32" name="flecha ajuste 3" descr="Flecha que lleva del plan anterior al ajuste"/>
           <p:cNvPicPr>
             <a:picLocks noChangeAspect="1"/>
           </p:cNvPicPr>
@@ -4070,7 +4070,7 @@
             <a:pPr algn="r"/>
             <a:fld id="{F7021451-1387-4CA6-816F-3879F97B5CBC}" type="slidenum">
               <a:rPr lang="en-US" b="0"/>
-              <a:t>10</a:t>
+              <a:t>12</a:t>
             </a:fld>
             <a:endParaRPr lang="en-US"/>
           </a:p>
@@ -4202,7 +4202,7 @@
       </p:sp>
       <p:pic>
         <p:nvPicPr>
-          <p:cNvPr id="6" name="ícono iterativa" descr="preencoded.png"/>
+          <p:cNvPr id="6" name="ícono iterativa" descr="Ícono de flechas circulares, para el ciclo iterativo"/>
           <p:cNvPicPr>
             <a:picLocks noChangeAspect="1"/>
           </p:cNvPicPr>
@@ -4328,7 +4328,7 @@
       </p:sp>
       <p:pic>
         <p:nvPicPr>
-          <p:cNvPr id="10" name="ícono Gestión" descr="preencoded.png"/>
+          <p:cNvPr id="10" name="ícono Gestión" descr="Ícono de lista de tareas"/>
           <p:cNvPicPr>
             <a:picLocks noChangeAspect="1"/>
           </p:cNvPicPr>
@@ -4451,7 +4451,7 @@
       </p:sp>
       <p:pic>
         <p:nvPicPr>
-          <p:cNvPr id="14" name="ícono Contrato de API congelado" descr="preencoded.png"/>
+          <p:cNvPr id="14" name="ícono Contrato de API congelado" descr="Ícono de documento con contrato"/>
           <p:cNvPicPr>
             <a:picLocks noChangeAspect="1"/>
           </p:cNvPicPr>
@@ -4539,7 +4539,7 @@
                   <a:schemeClr val="accent4"/>
                 </a:solidFill>
               </a:rPr>
-              <a:t>La web avanzó desde la S5 sin esperar al backend</a:t>
+              <a:t>La web avanzó desde la S5 sin esperar al servidor</a:t>
             </a:r>
             <a:endParaRPr lang="en-US" sz="1500" dirty="0"/>
           </a:p>
@@ -4574,7 +4574,7 @@
       </p:sp>
       <p:pic>
         <p:nvPicPr>
-          <p:cNvPr id="18" name="ícono Integración continua" descr="preencoded.png"/>
+          <p:cNvPr id="18" name="ícono Integración continua" descr="Ícono de ramas de código"/>
           <p:cNvPicPr>
             <a:picLocks noChangeAspect="1"/>
           </p:cNvPicPr>
@@ -4697,7 +4697,7 @@
       </p:sp>
       <p:pic>
         <p:nvPicPr>
-          <p:cNvPr id="22" name="ícono Evaluación honesta" descr="preencoded.png"/>
+          <p:cNvPr id="22" name="ícono Evaluación honesta" descr="Ícono de matraz de laboratorio"/>
           <p:cNvPicPr>
             <a:picLocks noChangeAspect="1"/>
           </p:cNvPicPr>
@@ -4820,7 +4820,7 @@
       </p:sp>
       <p:pic>
         <p:nvPicPr>
-          <p:cNvPr id="26" name="ícono Verificaciones con fecha" descr="preencoded.png"/>
+          <p:cNvPr id="26" name="ícono Verificaciones con fecha" descr="Ícono de calendario con marca de verificación"/>
           <p:cNvPicPr>
             <a:picLocks noChangeAspect="1"/>
           </p:cNvPicPr>
@@ -4943,7 +4943,7 @@
       </p:sp>
       <p:pic>
         <p:nvPicPr>
-          <p:cNvPr id="30" name="ícono Privacidad por diseño" descr="preencoded.png"/>
+          <p:cNvPr id="30" name="ícono Privacidad por diseño" descr="Ícono de escudo"/>
           <p:cNvPicPr>
             <a:picLocks noChangeAspect="1"/>
           </p:cNvPicPr>
@@ -5031,7 +5031,7 @@
                   <a:schemeClr val="accent4"/>
                 </a:solidFill>
               </a:rPr>
-              <a:t>Sin identificar personas; supresión de grupos de menos de 5</a:t>
+              <a:t>Sin identificar personas; supresión de celdas con menos de 5 casos</a:t>
             </a:r>
             <a:endParaRPr lang="en-US" sz="1500" dirty="0"/>
           </a:p>
@@ -5149,7 +5149,7 @@
             <a:pPr algn="r"/>
             <a:fld id="{F7021451-1387-4CA6-816F-3879F97B5CBC}" type="slidenum">
               <a:rPr lang="en-US" b="0"/>
-              <a:t>11</a:t>
+              <a:t>13</a:t>
             </a:fld>
             <a:endParaRPr lang="en-US"/>
           </a:p>
@@ -5281,7 +5281,7 @@
       </p:sp>
       <p:pic>
         <p:nvPicPr>
-          <p:cNvPr id="6" name="ícono Alcance de la versión 1.0 (S15)" descr="preencoded.png"/>
+          <p:cNvPr id="6" name="ícono Alcance de la versión 1.0 (S15)" descr="Ícono de círculo con marca de verificación"/>
           <p:cNvPicPr>
             <a:picLocks noChangeAspect="1"/>
           </p:cNvPicPr>
@@ -5509,7 +5509,7 @@
       </p:sp>
       <p:pic>
         <p:nvPicPr>
-          <p:cNvPr id="11" name="ícono Limitaciones" descr="preencoded.png"/>
+          <p:cNvPr id="11" name="ícono Limitaciones" descr="Ícono de triángulo de advertencia"/>
           <p:cNvPicPr>
             <a:picLocks noChangeAspect="1"/>
           </p:cNvPicPr>
@@ -5700,7 +5700,7 @@
             <a:pPr algn="r"/>
             <a:fld id="{F7021451-1387-4CA6-816F-3879F97B5CBC}" type="slidenum">
               <a:rPr lang="en-US" b="0"/>
-              <a:t>12</a:t>
+              <a:t>14</a:t>
             </a:fld>
             <a:endParaRPr lang="en-US"/>
           </a:p>
@@ -6324,7 +6324,7 @@
       </p:sp>
       <p:pic>
         <p:nvPicPr>
-          <p:cNvPr id="19" name="ícono casco cierre" descr="preencoded.png"/>
+          <p:cNvPr id="19" name="ícono casco cierre" descr="Ícono de casco de seguridad en un círculo naranja"/>
           <p:cNvPicPr>
             <a:picLocks noChangeAspect="1"/>
           </p:cNvPicPr>
@@ -6385,7 +6385,7 @@
             <a:pPr algn="r"/>
             <a:fld id="{F7021451-1387-4CA6-816F-3879F97B5CBC}" type="slidenum">
               <a:rPr lang="en-US" b="0"/>
-              <a:t>13</a:t>
+              <a:t>15</a:t>
             </a:fld>
             <a:endParaRPr lang="en-US"/>
           </a:p>
@@ -6491,7 +6491,7 @@
             <a:pPr algn="r"/>
             <a:fld id="{F7021451-1387-4CA6-816F-3879F97B5CBC}" type="slidenum">
               <a:rPr lang="en-US" b="0"/>
-              <a:t>12</a:t>
+              <a:t>10</a:t>
             </a:fld>
             <a:endParaRPr lang="en-US"/>
           </a:p>
@@ -6551,7 +6551,7 @@
       </p:sp>
       <p:pic>
         <p:nvPicPr>
-          <p:cNvPr id="27" name="captura panel general" descr="panel.png"/>
+          <p:cNvPr id="27" name="captura panel general" descr="Captura del panel general: filtros, indicador de hallazgos abiertos, tendencia semanal y ranking de EPP incumplido"/>
           <p:cNvPicPr>
             <a:picLocks noChangeAspect="1"/>
           </p:cNvPicPr>
@@ -6634,7 +6634,7 @@
       </p:sp>
       <p:pic>
         <p:nvPicPr>
-          <p:cNvPr id="29" name="captura reglas" descr="reglas.png"/>
+          <p:cNvPr id="29" name="captura reglas" descr="Captura de la pantalla de reglas de seguridad, con una regla activa por área"/>
           <p:cNvPicPr>
             <a:picLocks noChangeAspect="1"/>
           </p:cNvPicPr>
@@ -6717,7 +6717,7 @@
       </p:sp>
       <p:pic>
         <p:nvPicPr>
-          <p:cNvPr id="31" name="captura pedido en proceso" descr="pedido.png"/>
+          <p:cNvPr id="31" name="captura pedido en proceso" descr="Captura de la cola de videos con un video pedido desde la web en proceso y la vista del modelo con cajas"/>
           <p:cNvPicPr>
             <a:picLocks noChangeAspect="1"/>
           </p:cNvPicPr>
@@ -6800,7 +6800,7 @@
       </p:sp>
       <p:pic>
         <p:nvPicPr>
-          <p:cNvPr id="33" name="captura cola de videos" descr="cola.png"/>
+          <p:cNvPr id="33" name="captura cola de videos" descr="Captura de la cola de videos, con un video en cola y otro con error y botón para reprocesar"/>
           <p:cNvPicPr>
             <a:picLocks noChangeAspect="1"/>
           </p:cNvPicPr>
@@ -6962,7 +6962,7 @@
             <a:pPr algn="r"/>
             <a:fld id="{F7021451-1387-4CA6-816F-3879F97B5CBC}" type="slidenum">
               <a:rPr lang="en-US" b="0"/>
-              <a:t>12</a:t>
+              <a:t>11</a:t>
             </a:fld>
             <a:endParaRPr lang="en-US"/>
           </a:p>
@@ -6970,7 +6970,7 @@
       </p:sp>
       <p:pic>
         <p:nvPicPr>
-          <p:cNvPr id="26" name="diagrama entidad-relación" descr="er.png"/>
+          <p:cNvPr id="26" name="diagrama entidad-relación" descr="Diagrama entidad-relación de las 15 tablas de la base de datos y sus relaciones"/>
           <p:cNvPicPr>
             <a:picLocks noChangeAspect="1"/>
           </p:cNvPicPr>
@@ -7332,7 +7332,7 @@
       </p:sp>
       <p:pic>
         <p:nvPicPr>
-          <p:cNvPr id="6" name="ícono Edgar Tolentino" descr="preencoded.png"/>
+          <p:cNvPr id="6" name="ícono Edgar Tolentino" descr="Ícono de microprocesador, para el líder técnico"/>
           <p:cNvPicPr>
             <a:picLocks noChangeAspect="1"/>
           </p:cNvPicPr>
@@ -7599,7 +7599,7 @@
       </p:sp>
       <p:pic>
         <p:nvPicPr>
-          <p:cNvPr id="13" name="ícono Miguel Ortega" descr="preencoded.png"/>
+          <p:cNvPr id="13" name="ícono Miguel Ortega" descr="Ícono de monitor, para el desarrollo frontend"/>
           <p:cNvPicPr>
             <a:picLocks noChangeAspect="1"/>
           </p:cNvPicPr>
@@ -7866,7 +7866,7 @@
       </p:sp>
       <p:pic>
         <p:nvPicPr>
-          <p:cNvPr id="20" name="ícono Lian Grandón" descr="preencoded.png"/>
+          <p:cNvPr id="20" name="ícono Lian Grandón" descr="Ícono de portapapeles con marca de verificación, para frontend y calidad"/>
           <p:cNvPicPr>
             <a:picLocks noChangeAspect="1"/>
           </p:cNvPicPr>
@@ -8246,7 +8246,7 @@
       </p:sp>
       <p:pic>
         <p:nvPicPr>
-          <p:cNvPr id="6" name="ícono Problema" descr="preencoded.png"/>
+          <p:cNvPr id="6" name="ícono Problema" descr="Ícono de triángulo de advertencia"/>
           <p:cNvPicPr>
             <a:picLocks noChangeAspect="1"/>
           </p:cNvPicPr>
@@ -8401,7 +8401,7 @@
       </p:sp>
       <p:pic>
         <p:nvPicPr>
-          <p:cNvPr id="11" name="ícono Solución" descr="preencoded.png"/>
+          <p:cNvPr id="11" name="ícono Solución" descr="Ícono de casco de seguridad"/>
           <p:cNvPicPr>
             <a:picLocks noChangeAspect="1"/>
           </p:cNvPicPr>
@@ -8500,7 +8500,7 @@
       </p:sp>
       <p:pic>
         <p:nvPicPr>
-          <p:cNvPr id="14" name="captura bandeja" descr="/home/edgar/personal/duoc/_generadores/presentacion_fase2_teddy/caps/crops/bandeja.png"/>
+          <p:cNvPr id="14" name="captura bandeja" descr="Captura de la bandeja de hallazgos de la web, con un hallazgo de prioridad alta por revisar"/>
           <p:cNvPicPr>
             <a:picLocks noChangeAspect="1"/>
           </p:cNvPicPr>
@@ -8558,7 +8558,7 @@
       </p:sp>
       <p:pic>
         <p:nvPicPr>
-          <p:cNvPr id="16" name="ícono Sin identificar personas" descr="preencoded.png"/>
+          <p:cNvPr id="16" name="ícono Sin identificar personas" descr="Ícono de ojo tachado"/>
           <p:cNvPicPr>
             <a:picLocks noChangeAspect="1"/>
           </p:cNvPicPr>
@@ -8681,7 +8681,7 @@
       </p:sp>
       <p:pic>
         <p:nvPicPr>
-          <p:cNvPr id="20" name="ícono El humano valida" descr="preencoded.png"/>
+          <p:cNvPr id="20" name="ícono El humano valida" descr="Ícono de persona con marca de verificación"/>
           <p:cNvPicPr>
             <a:picLocks noChangeAspect="1"/>
           </p:cNvPicPr>
@@ -8804,7 +8804,7 @@
       </p:sp>
       <p:pic>
         <p:nvPicPr>
-          <p:cNvPr id="24" name="ícono Configurable" descr="preencoded.png"/>
+          <p:cNvPr id="24" name="ícono Configurable" descr="Ícono de engranajes"/>
           <p:cNvPicPr>
             <a:picLocks noChangeAspect="1"/>
           </p:cNvPicPr>
@@ -9761,7 +9761,7 @@
                   <a:schemeClr val="accent4"/>
                 </a:solidFill>
               </a:rPr>
-              <a:t>15 tablas y motor de reglas, tres semanas antes.</a:t>
+              <a:t>15 tablas y motor de reglas, cuatro semanas antes.</a:t>
             </a:r>
             <a:endParaRPr lang="en-US" sz="1500" dirty="0"/>
           </a:p>
@@ -10121,7 +10121,7 @@
                   <a:schemeClr val="accent4"/>
                 </a:solidFill>
               </a:rPr>
-              <a:t>1.319 pruebas automatizadas; plan formal en la S14.</a:t>
+              <a:t>1.312 pruebas automatizadas; plan formal en la S14.</a:t>
             </a:r>
             <a:endParaRPr lang="en-US" sz="1500" dirty="0"/>
           </a:p>
@@ -10442,7 +10442,7 @@
                 <a:ea typeface="Arial" pitchFamily="34" charset="-122"/>
                 <a:cs typeface="Arial" pitchFamily="34" charset="-120"/>
               </a:rPr>
-              <a:t>1.319</a:t>
+              <a:t>1.312</a:t>
             </a:r>
             <a:endParaRPr lang="en-US" sz="5400" dirty="0"/>
           </a:p>
@@ -10758,7 +10758,7 @@
                   <a:schemeClr val="tx1"/>
                 </a:solidFill>
               </a:rPr>
-              <a:t>Para 5 minutos de video</a:t>
+              <a:t>Para 5 minutos de video (9-oct)</a:t>
             </a:r>
             <a:endParaRPr lang="en-US" sz="2000" dirty="0"/>
           </a:p>
@@ -10829,7 +10829,7 @@
       </p:sp>
       <p:pic>
         <p:nvPicPr>
-          <p:cNvPr id="21" name="ícono 12 decisiones de arquitectura (ADR)" descr="preencoded.png"/>
+          <p:cNvPr id="21" name="ícono 12 decisiones de arquitectura (ADR)" descr="Ícono de documento con contrato"/>
           <p:cNvPicPr>
             <a:picLocks noChangeAspect="1"/>
           </p:cNvPicPr>
@@ -10916,7 +10916,7 @@
       </p:sp>
       <p:pic>
         <p:nvPicPr>
-          <p:cNvPr id="24" name="ícono 15 tablas en PostgreSQL" descr="preencoded.png"/>
+          <p:cNvPr id="24" name="ícono 15 tablas en PostgreSQL" descr="Ícono de base de datos"/>
           <p:cNvPicPr>
             <a:picLocks noChangeAspect="1"/>
           </p:cNvPicPr>
@@ -11003,7 +11003,7 @@
       </p:sp>
       <p:pic>
         <p:nvPicPr>
-          <p:cNvPr id="27" name="ícono 79 PR fusionados por el equipo" descr="preencoded.png"/>
+          <p:cNvPr id="27" name="ícono 79 PR fusionados por el equipo" descr="Ícono de ramas de código"/>
           <p:cNvPicPr>
             <a:picLocks noChangeAspect="1"/>
           </p:cNvPicPr>
@@ -11232,7 +11232,7 @@
       </p:sp>
       <p:pic>
         <p:nvPicPr>
-          <p:cNvPr id="6" name="ícono Video" descr="preencoded.png"/>
+          <p:cNvPr id="6" name="ícono Video" descr="Ícono de cinta de película"/>
           <p:cNvPicPr>
             <a:picLocks noChangeAspect="1"/>
           </p:cNvPicPr>
@@ -11328,7 +11328,7 @@
       </p:sp>
       <p:pic>
         <p:nvPicPr>
-          <p:cNvPr id="9" name="flecha 0" descr="preencoded.png"/>
+          <p:cNvPr id="9" name="flecha 0" descr="Flecha que indica el paso siguiente del flujo"/>
           <p:cNvPicPr>
             <a:picLocks noChangeAspect="1"/>
           </p:cNvPicPr>
@@ -11408,7 +11408,7 @@
       </p:sp>
       <p:pic>
         <p:nvPicPr>
-          <p:cNvPr id="12" name="ícono Detector" descr="preencoded.png"/>
+          <p:cNvPr id="12" name="ícono Detector" descr="Ícono de lupa"/>
           <p:cNvPicPr>
             <a:picLocks noChangeAspect="1"/>
           </p:cNvPicPr>
@@ -11504,7 +11504,7 @@
       </p:sp>
       <p:pic>
         <p:nvPicPr>
-          <p:cNvPr id="15" name="flecha 1" descr="preencoded.png"/>
+          <p:cNvPr id="15" name="flecha 1" descr="Flecha que indica el paso siguiente del flujo"/>
           <p:cNvPicPr>
             <a:picLocks noChangeAspect="1"/>
           </p:cNvPicPr>
@@ -11584,7 +11584,7 @@
       </p:sp>
       <p:pic>
         <p:nvPicPr>
-          <p:cNvPr id="18" name="ícono Seguimiento" descr="preencoded.png"/>
+          <p:cNvPr id="18" name="ícono Seguimiento" descr="Ícono de ruta con puntos"/>
           <p:cNvPicPr>
             <a:picLocks noChangeAspect="1"/>
           </p:cNvPicPr>
@@ -11680,7 +11680,7 @@
       </p:sp>
       <p:pic>
         <p:nvPicPr>
-          <p:cNvPr id="21" name="flecha 2" descr="preencoded.png"/>
+          <p:cNvPr id="21" name="flecha 2" descr="Flecha que indica el paso siguiente del flujo"/>
           <p:cNvPicPr>
             <a:picLocks noChangeAspect="1"/>
           </p:cNvPicPr>
@@ -11760,7 +11760,7 @@
       </p:sp>
       <p:pic>
         <p:nvPicPr>
-          <p:cNvPr id="24" name="ícono Hallazgo" descr="preencoded.png"/>
+          <p:cNvPr id="24" name="ícono Hallazgo" descr="Ícono de capas apiladas"/>
           <p:cNvPicPr>
             <a:picLocks noChangeAspect="1"/>
           </p:cNvPicPr>
@@ -11856,7 +11856,7 @@
       </p:sp>
       <p:pic>
         <p:nvPicPr>
-          <p:cNvPr id="27" name="flecha 3" descr="preencoded.png"/>
+          <p:cNvPr id="27" name="flecha 3" descr="Flecha que indica el paso siguiente del flujo"/>
           <p:cNvPicPr>
             <a:picLocks noChangeAspect="1"/>
           </p:cNvPicPr>
@@ -11936,7 +11936,7 @@
       </p:sp>
       <p:pic>
         <p:nvPicPr>
-          <p:cNvPr id="30" name="ícono Reglas" descr="preencoded.png"/>
+          <p:cNvPr id="30" name="ícono Reglas" descr="Ícono de balanza"/>
           <p:cNvPicPr>
             <a:picLocks noChangeAspect="1"/>
           </p:cNvPicPr>
@@ -12032,7 +12032,7 @@
       </p:sp>
       <p:pic>
         <p:nvPicPr>
-          <p:cNvPr id="33" name="flecha 4" descr="preencoded.png"/>
+          <p:cNvPr id="33" name="flecha 4" descr="Flecha que indica el paso siguiente del flujo"/>
           <p:cNvPicPr>
             <a:picLocks noChangeAspect="1"/>
           </p:cNvPicPr>
@@ -12112,7 +12112,7 @@
       </p:sp>
       <p:pic>
         <p:nvPicPr>
-          <p:cNvPr id="36" name="ícono Web y alertas" descr="preencoded.png"/>
+          <p:cNvPr id="36" name="ícono Web y alertas" descr="Ícono de campana"/>
           <p:cNvPicPr>
             <a:picLocks noChangeAspect="1"/>
           </p:cNvPicPr>
@@ -14329,7 +14329,7 @@
       </p:sp>
       <p:pic>
         <p:nvPicPr>
-          <p:cNvPr id="7" name="ícono Etiquetado en CVAT" descr="preencoded.png"/>
+          <p:cNvPr id="7" name="ícono Etiquetado en CVAT" descr="Ícono de etiquetas"/>
           <p:cNvPicPr>
             <a:picLocks noChangeAspect="1"/>
           </p:cNvPicPr>
@@ -14481,7 +14481,7 @@
       </p:sp>
       <p:pic>
         <p:nvPicPr>
-          <p:cNvPr id="12" name="ícono Modelo v1: RF-DETR Nano" descr="preencoded.png"/>
+          <p:cNvPr id="12" name="ícono Modelo v1: RF-DETR Nano" descr="Ícono de microprocesador"/>
           <p:cNvPicPr>
             <a:picLocks noChangeAspect="1"/>
           </p:cNvPicPr>
@@ -14633,7 +14633,7 @@
       </p:sp>
       <p:pic>
         <p:nvPicPr>
-          <p:cNvPr id="17" name="ícono Lo que falta" descr="preencoded.png"/>
+          <p:cNvPr id="17" name="ícono Lo que falta" descr="Ícono de matraz de laboratorio"/>
           <p:cNvPicPr>
             <a:picLocks noChangeAspect="1"/>
           </p:cNvPicPr>
@@ -14842,7 +14842,7 @@
       </p:sp>
       <p:pic>
         <p:nvPicPr>
-          <p:cNvPr id="4" name="captura visor" descr="/home/edgar/personal/duoc/_generadores/presentacion_fase2_teddy/caps/crops/visor.png"/>
+          <p:cNvPr id="4" name="captura visor" descr="Captura del visor de evidencia de un hallazgo: persona con el rostro pixelado, línea de tiempo del evento y botones para confirmar o descartar"/>
           <p:cNvPicPr>
             <a:picLocks noChangeAspect="1"/>
           </p:cNvPicPr>
@@ -15290,7 +15290,7 @@
         <p:spPr>
           <a:xfrm>
             <a:off x="7528255" y="5728447"/>
-            <a:ext cx="4114800" cy="274320"/>
+            <a:ext cx="4114800" cy="420000"/>
           </a:xfrm>
           <a:prstGeom prst="rect">
             <a:avLst/>
@@ -15311,7 +15311,7 @@
                   <a:schemeClr val="accent6"/>
                 </a:solidFill>
               </a:rPr>
-              <a:t>Visor: el rostro se difumina antes de guardarse</a:t>
+              <a:t>Visor (demo, detector simulado): el rostro se difumina antes de guardarse</a:t>
             </a:r>
             <a:endParaRPr lang="en-US" sz="1200" dirty="0"/>
           </a:p>
@@ -15364,7 +15364,7 @@
       </p:sp>
       <p:pic>
         <p:nvPicPr>
-          <p:cNvPr id="26" name="captura vista en vivo" descr="2026-10-12-vista-en-vivo-modelo.png"/>
+          <p:cNvPr id="26" name="captura vista en vivo" descr="Captura de la vista en vivo del procesamiento: cuadro de la obra con cajas de persona y casco sobre dos trabajadores, con los rostros tapados"/>
           <p:cNvPicPr>
             <a:picLocks noChangeAspect="1"/>
           </p:cNvPicPr>
